--- a/slides/decks/s05-gvhd-prophylaxis.pptx
+++ b/slides/decks/s05-gvhd-prophylaxis.pptx
@@ -135,13 +135,13 @@
   <p:extLst>
     <p:ext uri="{521415D9-36F7-43E2-AB2F-B90AF26B5E84}">
       <p14:sectionLst xmlns:p14="http://schemas.microsoft.com/office/powerpoint/2010/main">
-        <p14:section name="Opening" id="{f41559db-caf4-c7a6-d5c5-3eb2fc79fbf0}">
+        <p14:section name="Opening" id="{8b5421f0-ade3-3dd5-67a0-e53e241cbdcb}">
           <p14:sldIdLst>
             <p14:sldId id="256"/>
             <p14:sldId id="257"/>
           </p14:sldIdLst>
         </p14:section>
-        <p14:section name="Why prophylaxis and CNI backbones" id="{fc6c82c7-7f50-574b-6866-0fd07c88f363}">
+        <p14:section name="Why prophylaxis and CNI backbones" id="{33c48177-6bc2-f043-9917-1c0f88022e73}">
           <p14:sldIdLst>
             <p14:sldId id="258"/>
             <p14:sldId id="259"/>
@@ -150,7 +150,7 @@
             <p14:sldId id="262"/>
           </p14:sldIdLst>
         </p14:section>
-        <p14:section name="Newer agents and serotherapy" id="{07c0d6ab-4296-6b5f-8637-0480329c1711}">
+        <p14:section name="Newer agents and serotherapy" id="{94eb0590-8087-8e18-3bed-c5e3ff9a8eb7}">
           <p14:sldIdLst>
             <p14:sldId id="263"/>
             <p14:sldId id="264"/>
@@ -159,7 +159,7 @@
             <p14:sldId id="267"/>
           </p14:sldIdLst>
         </p14:section>
-        <p14:section name="PTCy and graft manipulation" id="{400d8887-cc1d-f834-a48c-df07e25e1bed}">
+        <p14:section name="PTCy and graft manipulation" id="{6ee2a1da-3ba4-98ad-9ea5-ca9a05b2567d}">
           <p14:sldIdLst>
             <p14:sldId id="268"/>
             <p14:sldId id="269"/>
@@ -167,7 +167,7 @@
             <p14:sldId id="271"/>
           </p14:sldIdLst>
         </p14:section>
-        <p14:section name="Board questions" id="{d02f1fc5-a928-5706-3a06-d3a1e3f9d22b}">
+        <p14:section name="Board questions" id="{ab6f773c-c615-56d9-b9c7-4809a12e04dc}">
           <p14:sldIdLst>
             <p14:sldId id="272"/>
             <p14:sldId id="273"/>
@@ -177,7 +177,7 @@
             <p14:sldId id="277"/>
           </p14:sldIdLst>
         </p14:section>
-        <p14:section name="References" id="{9b12f953-a42f-fd01-5167-5cef4b9db8d5}">
+        <p14:section name="References" id="{cf00419c-c779-2c9a-3a7f-7d0cb7e39299}">
           <p14:sldIdLst>
             <p14:sldId id="278"/>
             <p14:sldId id="279"/>
@@ -185,7 +185,7 @@
             <p14:sldId id="281"/>
           </p14:sldIdLst>
         </p14:section>
-        <p14:section name="Backup" id="{9f4cda18-4e99-b37f-e500-dd75d901c782}">
+        <p14:section name="Backup" id="{dca8d001-d138-ff3f-0529-ad1f837862b3}">
           <p14:sldIdLst>
             <p14:sldId id="282"/>
             <p14:sldId id="283"/>
